--- a/馨香晚祭.pptx
+++ b/馨香晚祭.pptx
@@ -110,6 +110,11 @@
       </a:defRPr>
     </a:lvl9pPr>
   </p:defaultTextStyle>
+  <p:extLst>
+    <p:ext uri="{EFAFB233-063F-42B5-8137-9DF3F51BA10A}">
+      <p15:sldGuideLst xmlns:p15="http://schemas.microsoft.com/office/powerpoint/2012/main"/>
+    </p:ext>
+  </p:extLst>
 </p:presentation>
 </file>
 
@@ -151,7 +156,7 @@
           <a:lstStyle/>
           <a:p>
             <a:r>
-              <a:rPr lang="en-US" altLang="zh-TW" smtClean="0"/>
+              <a:rPr lang="en-US" altLang="zh-TW"/>
               <a:t>Click to edit Master title style</a:t>
             </a:r>
             <a:endParaRPr lang="zh-TW" altLang="en-US"/>
@@ -270,7 +275,7 @@
           </a:lstStyle>
           <a:p>
             <a:r>
-              <a:rPr lang="en-US" altLang="zh-TW" smtClean="0"/>
+              <a:rPr lang="en-US" altLang="zh-TW"/>
               <a:t>Click to edit Master subtitle style</a:t>
             </a:r>
             <a:endParaRPr lang="zh-TW" altLang="en-US"/>
@@ -294,7 +299,7 @@
           <a:p>
             <a:fld id="{5FE59850-C8E3-47BC-9105-AE38EDB88EB5}" type="datetimeFigureOut">
               <a:rPr lang="en-US" smtClean="0"/>
-              <a:t>9/29/2023</a:t>
+              <a:t>6/19/2026</a:t>
             </a:fld>
             <a:endParaRPr lang="en-US"/>
           </a:p>
@@ -388,7 +393,7 @@
           <a:lstStyle/>
           <a:p>
             <a:r>
-              <a:rPr lang="en-US" altLang="zh-TW" smtClean="0"/>
+              <a:rPr lang="en-US" altLang="zh-TW"/>
               <a:t>Click to edit Master title style</a:t>
             </a:r>
             <a:endParaRPr lang="zh-TW" altLang="en-US"/>
@@ -412,35 +417,35 @@
           <a:p>
             <a:pPr lvl="0"/>
             <a:r>
-              <a:rPr lang="en-US" altLang="zh-TW" smtClean="0"/>
+              <a:rPr lang="en-US" altLang="zh-TW"/>
               <a:t>Edit Master text styles</a:t>
             </a:r>
           </a:p>
           <a:p>
             <a:pPr lvl="1"/>
             <a:r>
-              <a:rPr lang="en-US" altLang="zh-TW" smtClean="0"/>
+              <a:rPr lang="en-US" altLang="zh-TW"/>
               <a:t>Second level</a:t>
             </a:r>
           </a:p>
           <a:p>
             <a:pPr lvl="2"/>
             <a:r>
-              <a:rPr lang="en-US" altLang="zh-TW" smtClean="0"/>
+              <a:rPr lang="en-US" altLang="zh-TW"/>
               <a:t>Third level</a:t>
             </a:r>
           </a:p>
           <a:p>
             <a:pPr lvl="3"/>
             <a:r>
-              <a:rPr lang="en-US" altLang="zh-TW" smtClean="0"/>
+              <a:rPr lang="en-US" altLang="zh-TW"/>
               <a:t>Fourth level</a:t>
             </a:r>
           </a:p>
           <a:p>
             <a:pPr lvl="4"/>
             <a:r>
-              <a:rPr lang="en-US" altLang="zh-TW" smtClean="0"/>
+              <a:rPr lang="en-US" altLang="zh-TW"/>
               <a:t>Fifth level</a:t>
             </a:r>
             <a:endParaRPr lang="zh-TW" altLang="en-US"/>
@@ -464,7 +469,7 @@
           <a:p>
             <a:fld id="{5FE59850-C8E3-47BC-9105-AE38EDB88EB5}" type="datetimeFigureOut">
               <a:rPr lang="en-US" smtClean="0"/>
-              <a:t>9/29/2023</a:t>
+              <a:t>6/19/2026</a:t>
             </a:fld>
             <a:endParaRPr lang="en-US"/>
           </a:p>
@@ -563,7 +568,7 @@
           <a:lstStyle/>
           <a:p>
             <a:r>
-              <a:rPr lang="en-US" altLang="zh-TW" smtClean="0"/>
+              <a:rPr lang="en-US" altLang="zh-TW"/>
               <a:t>Click to edit Master title style</a:t>
             </a:r>
             <a:endParaRPr lang="zh-TW" altLang="en-US"/>
@@ -592,35 +597,35 @@
           <a:p>
             <a:pPr lvl="0"/>
             <a:r>
-              <a:rPr lang="en-US" altLang="zh-TW" smtClean="0"/>
+              <a:rPr lang="en-US" altLang="zh-TW"/>
               <a:t>Edit Master text styles</a:t>
             </a:r>
           </a:p>
           <a:p>
             <a:pPr lvl="1"/>
             <a:r>
-              <a:rPr lang="en-US" altLang="zh-TW" smtClean="0"/>
+              <a:rPr lang="en-US" altLang="zh-TW"/>
               <a:t>Second level</a:t>
             </a:r>
           </a:p>
           <a:p>
             <a:pPr lvl="2"/>
             <a:r>
-              <a:rPr lang="en-US" altLang="zh-TW" smtClean="0"/>
+              <a:rPr lang="en-US" altLang="zh-TW"/>
               <a:t>Third level</a:t>
             </a:r>
           </a:p>
           <a:p>
             <a:pPr lvl="3"/>
             <a:r>
-              <a:rPr lang="en-US" altLang="zh-TW" smtClean="0"/>
+              <a:rPr lang="en-US" altLang="zh-TW"/>
               <a:t>Fourth level</a:t>
             </a:r>
           </a:p>
           <a:p>
             <a:pPr lvl="4"/>
             <a:r>
-              <a:rPr lang="en-US" altLang="zh-TW" smtClean="0"/>
+              <a:rPr lang="en-US" altLang="zh-TW"/>
               <a:t>Fifth level</a:t>
             </a:r>
             <a:endParaRPr lang="zh-TW" altLang="en-US"/>
@@ -644,7 +649,7 @@
           <a:p>
             <a:fld id="{5FE59850-C8E3-47BC-9105-AE38EDB88EB5}" type="datetimeFigureOut">
               <a:rPr lang="en-US" smtClean="0"/>
-              <a:t>9/29/2023</a:t>
+              <a:t>6/19/2026</a:t>
             </a:fld>
             <a:endParaRPr lang="en-US"/>
           </a:p>
@@ -738,7 +743,7 @@
           <a:lstStyle/>
           <a:p>
             <a:r>
-              <a:rPr lang="en-US" altLang="zh-TW" smtClean="0"/>
+              <a:rPr lang="en-US" altLang="zh-TW"/>
               <a:t>Click to edit Master title style</a:t>
             </a:r>
             <a:endParaRPr lang="zh-TW" altLang="en-US"/>
@@ -762,35 +767,35 @@
           <a:p>
             <a:pPr lvl="0"/>
             <a:r>
-              <a:rPr lang="en-US" altLang="zh-TW" smtClean="0"/>
+              <a:rPr lang="en-US" altLang="zh-TW"/>
               <a:t>Edit Master text styles</a:t>
             </a:r>
           </a:p>
           <a:p>
             <a:pPr lvl="1"/>
             <a:r>
-              <a:rPr lang="en-US" altLang="zh-TW" smtClean="0"/>
+              <a:rPr lang="en-US" altLang="zh-TW"/>
               <a:t>Second level</a:t>
             </a:r>
           </a:p>
           <a:p>
             <a:pPr lvl="2"/>
             <a:r>
-              <a:rPr lang="en-US" altLang="zh-TW" smtClean="0"/>
+              <a:rPr lang="en-US" altLang="zh-TW"/>
               <a:t>Third level</a:t>
             </a:r>
           </a:p>
           <a:p>
             <a:pPr lvl="3"/>
             <a:r>
-              <a:rPr lang="en-US" altLang="zh-TW" smtClean="0"/>
+              <a:rPr lang="en-US" altLang="zh-TW"/>
               <a:t>Fourth level</a:t>
             </a:r>
           </a:p>
           <a:p>
             <a:pPr lvl="4"/>
             <a:r>
-              <a:rPr lang="en-US" altLang="zh-TW" smtClean="0"/>
+              <a:rPr lang="en-US" altLang="zh-TW"/>
               <a:t>Fifth level</a:t>
             </a:r>
             <a:endParaRPr lang="zh-TW" altLang="en-US"/>
@@ -814,7 +819,7 @@
           <a:p>
             <a:fld id="{5FE59850-C8E3-47BC-9105-AE38EDB88EB5}" type="datetimeFigureOut">
               <a:rPr lang="en-US" smtClean="0"/>
-              <a:t>9/29/2023</a:t>
+              <a:t>6/19/2026</a:t>
             </a:fld>
             <a:endParaRPr lang="en-US"/>
           </a:p>
@@ -917,7 +922,7 @@
           </a:lstStyle>
           <a:p>
             <a:r>
-              <a:rPr lang="en-US" altLang="zh-TW" smtClean="0"/>
+              <a:rPr lang="en-US" altLang="zh-TW"/>
               <a:t>Click to edit Master title style</a:t>
             </a:r>
             <a:endParaRPr lang="zh-TW" altLang="en-US"/>
@@ -1037,7 +1042,7 @@
           <a:p>
             <a:pPr lvl="0"/>
             <a:r>
-              <a:rPr lang="en-US" altLang="zh-TW" smtClean="0"/>
+              <a:rPr lang="en-US" altLang="zh-TW"/>
               <a:t>Edit Master text styles</a:t>
             </a:r>
           </a:p>
@@ -1060,7 +1065,7 @@
           <a:p>
             <a:fld id="{5FE59850-C8E3-47BC-9105-AE38EDB88EB5}" type="datetimeFigureOut">
               <a:rPr lang="en-US" smtClean="0"/>
-              <a:t>9/29/2023</a:t>
+              <a:t>6/19/2026</a:t>
             </a:fld>
             <a:endParaRPr lang="en-US"/>
           </a:p>
@@ -1154,7 +1159,7 @@
           <a:lstStyle/>
           <a:p>
             <a:r>
-              <a:rPr lang="en-US" altLang="zh-TW" smtClean="0"/>
+              <a:rPr lang="en-US" altLang="zh-TW"/>
               <a:t>Click to edit Master title style</a:t>
             </a:r>
             <a:endParaRPr lang="zh-TW" altLang="en-US"/>
@@ -1211,35 +1216,35 @@
           <a:p>
             <a:pPr lvl="0"/>
             <a:r>
-              <a:rPr lang="en-US" altLang="zh-TW" smtClean="0"/>
+              <a:rPr lang="en-US" altLang="zh-TW"/>
               <a:t>Edit Master text styles</a:t>
             </a:r>
           </a:p>
           <a:p>
             <a:pPr lvl="1"/>
             <a:r>
-              <a:rPr lang="en-US" altLang="zh-TW" smtClean="0"/>
+              <a:rPr lang="en-US" altLang="zh-TW"/>
               <a:t>Second level</a:t>
             </a:r>
           </a:p>
           <a:p>
             <a:pPr lvl="2"/>
             <a:r>
-              <a:rPr lang="en-US" altLang="zh-TW" smtClean="0"/>
+              <a:rPr lang="en-US" altLang="zh-TW"/>
               <a:t>Third level</a:t>
             </a:r>
           </a:p>
           <a:p>
             <a:pPr lvl="3"/>
             <a:r>
-              <a:rPr lang="en-US" altLang="zh-TW" smtClean="0"/>
+              <a:rPr lang="en-US" altLang="zh-TW"/>
               <a:t>Fourth level</a:t>
             </a:r>
           </a:p>
           <a:p>
             <a:pPr lvl="4"/>
             <a:r>
-              <a:rPr lang="en-US" altLang="zh-TW" smtClean="0"/>
+              <a:rPr lang="en-US" altLang="zh-TW"/>
               <a:t>Fifth level</a:t>
             </a:r>
             <a:endParaRPr lang="zh-TW" altLang="en-US"/>
@@ -1296,35 +1301,35 @@
           <a:p>
             <a:pPr lvl="0"/>
             <a:r>
-              <a:rPr lang="en-US" altLang="zh-TW" smtClean="0"/>
+              <a:rPr lang="en-US" altLang="zh-TW"/>
               <a:t>Edit Master text styles</a:t>
             </a:r>
           </a:p>
           <a:p>
             <a:pPr lvl="1"/>
             <a:r>
-              <a:rPr lang="en-US" altLang="zh-TW" smtClean="0"/>
+              <a:rPr lang="en-US" altLang="zh-TW"/>
               <a:t>Second level</a:t>
             </a:r>
           </a:p>
           <a:p>
             <a:pPr lvl="2"/>
             <a:r>
-              <a:rPr lang="en-US" altLang="zh-TW" smtClean="0"/>
+              <a:rPr lang="en-US" altLang="zh-TW"/>
               <a:t>Third level</a:t>
             </a:r>
           </a:p>
           <a:p>
             <a:pPr lvl="3"/>
             <a:r>
-              <a:rPr lang="en-US" altLang="zh-TW" smtClean="0"/>
+              <a:rPr lang="en-US" altLang="zh-TW"/>
               <a:t>Fourth level</a:t>
             </a:r>
           </a:p>
           <a:p>
             <a:pPr lvl="4"/>
             <a:r>
-              <a:rPr lang="en-US" altLang="zh-TW" smtClean="0"/>
+              <a:rPr lang="en-US" altLang="zh-TW"/>
               <a:t>Fifth level</a:t>
             </a:r>
             <a:endParaRPr lang="zh-TW" altLang="en-US"/>
@@ -1348,7 +1353,7 @@
           <a:p>
             <a:fld id="{5FE59850-C8E3-47BC-9105-AE38EDB88EB5}" type="datetimeFigureOut">
               <a:rPr lang="en-US" smtClean="0"/>
-              <a:t>9/29/2023</a:t>
+              <a:t>6/19/2026</a:t>
             </a:fld>
             <a:endParaRPr lang="en-US"/>
           </a:p>
@@ -1446,7 +1451,7 @@
           </a:lstStyle>
           <a:p>
             <a:r>
-              <a:rPr lang="en-US" altLang="zh-TW" smtClean="0"/>
+              <a:rPr lang="en-US" altLang="zh-TW"/>
               <a:t>Click to edit Master title style</a:t>
             </a:r>
             <a:endParaRPr lang="zh-TW" altLang="en-US"/>
@@ -1512,7 +1517,7 @@
           <a:p>
             <a:pPr lvl="0"/>
             <a:r>
-              <a:rPr lang="en-US" altLang="zh-TW" smtClean="0"/>
+              <a:rPr lang="en-US" altLang="zh-TW"/>
               <a:t>Edit Master text styles</a:t>
             </a:r>
           </a:p>
@@ -1568,35 +1573,35 @@
           <a:p>
             <a:pPr lvl="0"/>
             <a:r>
-              <a:rPr lang="en-US" altLang="zh-TW" smtClean="0"/>
+              <a:rPr lang="en-US" altLang="zh-TW"/>
               <a:t>Edit Master text styles</a:t>
             </a:r>
           </a:p>
           <a:p>
             <a:pPr lvl="1"/>
             <a:r>
-              <a:rPr lang="en-US" altLang="zh-TW" smtClean="0"/>
+              <a:rPr lang="en-US" altLang="zh-TW"/>
               <a:t>Second level</a:t>
             </a:r>
           </a:p>
           <a:p>
             <a:pPr lvl="2"/>
             <a:r>
-              <a:rPr lang="en-US" altLang="zh-TW" smtClean="0"/>
+              <a:rPr lang="en-US" altLang="zh-TW"/>
               <a:t>Third level</a:t>
             </a:r>
           </a:p>
           <a:p>
             <a:pPr lvl="3"/>
             <a:r>
-              <a:rPr lang="en-US" altLang="zh-TW" smtClean="0"/>
+              <a:rPr lang="en-US" altLang="zh-TW"/>
               <a:t>Fourth level</a:t>
             </a:r>
           </a:p>
           <a:p>
             <a:pPr lvl="4"/>
             <a:r>
-              <a:rPr lang="en-US" altLang="zh-TW" smtClean="0"/>
+              <a:rPr lang="en-US" altLang="zh-TW"/>
               <a:t>Fifth level</a:t>
             </a:r>
             <a:endParaRPr lang="zh-TW" altLang="en-US"/>
@@ -1662,7 +1667,7 @@
           <a:p>
             <a:pPr lvl="0"/>
             <a:r>
-              <a:rPr lang="en-US" altLang="zh-TW" smtClean="0"/>
+              <a:rPr lang="en-US" altLang="zh-TW"/>
               <a:t>Edit Master text styles</a:t>
             </a:r>
           </a:p>
@@ -1718,35 +1723,35 @@
           <a:p>
             <a:pPr lvl="0"/>
             <a:r>
-              <a:rPr lang="en-US" altLang="zh-TW" smtClean="0"/>
+              <a:rPr lang="en-US" altLang="zh-TW"/>
               <a:t>Edit Master text styles</a:t>
             </a:r>
           </a:p>
           <a:p>
             <a:pPr lvl="1"/>
             <a:r>
-              <a:rPr lang="en-US" altLang="zh-TW" smtClean="0"/>
+              <a:rPr lang="en-US" altLang="zh-TW"/>
               <a:t>Second level</a:t>
             </a:r>
           </a:p>
           <a:p>
             <a:pPr lvl="2"/>
             <a:r>
-              <a:rPr lang="en-US" altLang="zh-TW" smtClean="0"/>
+              <a:rPr lang="en-US" altLang="zh-TW"/>
               <a:t>Third level</a:t>
             </a:r>
           </a:p>
           <a:p>
             <a:pPr lvl="3"/>
             <a:r>
-              <a:rPr lang="en-US" altLang="zh-TW" smtClean="0"/>
+              <a:rPr lang="en-US" altLang="zh-TW"/>
               <a:t>Fourth level</a:t>
             </a:r>
           </a:p>
           <a:p>
             <a:pPr lvl="4"/>
             <a:r>
-              <a:rPr lang="en-US" altLang="zh-TW" smtClean="0"/>
+              <a:rPr lang="en-US" altLang="zh-TW"/>
               <a:t>Fifth level</a:t>
             </a:r>
             <a:endParaRPr lang="zh-TW" altLang="en-US"/>
@@ -1770,7 +1775,7 @@
           <a:p>
             <a:fld id="{5FE59850-C8E3-47BC-9105-AE38EDB88EB5}" type="datetimeFigureOut">
               <a:rPr lang="en-US" smtClean="0"/>
-              <a:t>9/29/2023</a:t>
+              <a:t>6/19/2026</a:t>
             </a:fld>
             <a:endParaRPr lang="en-US"/>
           </a:p>
@@ -1864,7 +1869,7 @@
           <a:lstStyle/>
           <a:p>
             <a:r>
-              <a:rPr lang="en-US" altLang="zh-TW" smtClean="0"/>
+              <a:rPr lang="en-US" altLang="zh-TW"/>
               <a:t>Click to edit Master title style</a:t>
             </a:r>
             <a:endParaRPr lang="zh-TW" altLang="en-US"/>
@@ -1888,7 +1893,7 @@
           <a:p>
             <a:fld id="{5FE59850-C8E3-47BC-9105-AE38EDB88EB5}" type="datetimeFigureOut">
               <a:rPr lang="en-US" smtClean="0"/>
-              <a:t>9/29/2023</a:t>
+              <a:t>6/19/2026</a:t>
             </a:fld>
             <a:endParaRPr lang="en-US"/>
           </a:p>
@@ -1983,7 +1988,7 @@
           <a:p>
             <a:fld id="{5FE59850-C8E3-47BC-9105-AE38EDB88EB5}" type="datetimeFigureOut">
               <a:rPr lang="en-US" smtClean="0"/>
-              <a:t>9/29/2023</a:t>
+              <a:t>6/19/2026</a:t>
             </a:fld>
             <a:endParaRPr lang="en-US"/>
           </a:p>
@@ -2086,7 +2091,7 @@
           </a:lstStyle>
           <a:p>
             <a:r>
-              <a:rPr lang="en-US" altLang="zh-TW" smtClean="0"/>
+              <a:rPr lang="en-US" altLang="zh-TW"/>
               <a:t>Click to edit Master title style</a:t>
             </a:r>
             <a:endParaRPr lang="zh-TW" altLang="en-US"/>
@@ -2143,35 +2148,35 @@
           <a:p>
             <a:pPr lvl="0"/>
             <a:r>
-              <a:rPr lang="en-US" altLang="zh-TW" smtClean="0"/>
+              <a:rPr lang="en-US" altLang="zh-TW"/>
               <a:t>Edit Master text styles</a:t>
             </a:r>
           </a:p>
           <a:p>
             <a:pPr lvl="1"/>
             <a:r>
-              <a:rPr lang="en-US" altLang="zh-TW" smtClean="0"/>
+              <a:rPr lang="en-US" altLang="zh-TW"/>
               <a:t>Second level</a:t>
             </a:r>
           </a:p>
           <a:p>
             <a:pPr lvl="2"/>
             <a:r>
-              <a:rPr lang="en-US" altLang="zh-TW" smtClean="0"/>
+              <a:rPr lang="en-US" altLang="zh-TW"/>
               <a:t>Third level</a:t>
             </a:r>
           </a:p>
           <a:p>
             <a:pPr lvl="3"/>
             <a:r>
-              <a:rPr lang="en-US" altLang="zh-TW" smtClean="0"/>
+              <a:rPr lang="en-US" altLang="zh-TW"/>
               <a:t>Fourth level</a:t>
             </a:r>
           </a:p>
           <a:p>
             <a:pPr lvl="4"/>
             <a:r>
-              <a:rPr lang="en-US" altLang="zh-TW" smtClean="0"/>
+              <a:rPr lang="en-US" altLang="zh-TW"/>
               <a:t>Fifth level</a:t>
             </a:r>
             <a:endParaRPr lang="zh-TW" altLang="en-US"/>
@@ -2237,7 +2242,7 @@
           <a:p>
             <a:pPr lvl="0"/>
             <a:r>
-              <a:rPr lang="en-US" altLang="zh-TW" smtClean="0"/>
+              <a:rPr lang="en-US" altLang="zh-TW"/>
               <a:t>Edit Master text styles</a:t>
             </a:r>
           </a:p>
@@ -2260,7 +2265,7 @@
           <a:p>
             <a:fld id="{5FE59850-C8E3-47BC-9105-AE38EDB88EB5}" type="datetimeFigureOut">
               <a:rPr lang="en-US" smtClean="0"/>
-              <a:t>9/29/2023</a:t>
+              <a:t>6/19/2026</a:t>
             </a:fld>
             <a:endParaRPr lang="en-US"/>
           </a:p>
@@ -2363,7 +2368,7 @@
           </a:lstStyle>
           <a:p>
             <a:r>
-              <a:rPr lang="en-US" altLang="zh-TW" smtClean="0"/>
+              <a:rPr lang="en-US" altLang="zh-TW"/>
               <a:t>Click to edit Master title style</a:t>
             </a:r>
             <a:endParaRPr lang="zh-TW" altLang="en-US"/>
@@ -2428,7 +2433,7 @@
           </a:lstStyle>
           <a:p>
             <a:r>
-              <a:rPr lang="en-US" altLang="zh-TW" smtClean="0"/>
+              <a:rPr lang="en-US" altLang="zh-TW"/>
               <a:t>Click icon to add picture</a:t>
             </a:r>
             <a:endParaRPr lang="zh-TW" altLang="en-US"/>
@@ -2494,7 +2499,7 @@
           <a:p>
             <a:pPr lvl="0"/>
             <a:r>
-              <a:rPr lang="en-US" altLang="zh-TW" smtClean="0"/>
+              <a:rPr lang="en-US" altLang="zh-TW"/>
               <a:t>Edit Master text styles</a:t>
             </a:r>
           </a:p>
@@ -2517,7 +2522,7 @@
           <a:p>
             <a:fld id="{5FE59850-C8E3-47BC-9105-AE38EDB88EB5}" type="datetimeFigureOut">
               <a:rPr lang="en-US" smtClean="0"/>
-              <a:t>9/29/2023</a:t>
+              <a:t>6/19/2026</a:t>
             </a:fld>
             <a:endParaRPr lang="en-US"/>
           </a:p>
@@ -2631,10 +2636,9 @@
           <a:lstStyle/>
           <a:p>
             <a:r>
-              <a:rPr lang="zh-TW" altLang="en-US" smtClean="0"/>
+              <a:rPr lang="zh-TW" altLang="en-US"/>
               <a:t>按一下以編輯母片標題樣式</a:t>
             </a:r>
-            <a:endParaRPr lang="zh-TW" altLang="en-US"/>
           </a:p>
         </p:txBody>
       </p:sp>
@@ -2665,38 +2669,37 @@
           <a:p>
             <a:pPr lvl="0"/>
             <a:r>
-              <a:rPr lang="zh-TW" altLang="en-US" smtClean="0"/>
+              <a:rPr lang="zh-TW" altLang="en-US"/>
               <a:t>按一下以編輯母片文字樣式</a:t>
             </a:r>
           </a:p>
           <a:p>
             <a:pPr lvl="1"/>
             <a:r>
-              <a:rPr lang="zh-TW" altLang="en-US" smtClean="0"/>
+              <a:rPr lang="zh-TW" altLang="en-US"/>
               <a:t>第二層</a:t>
             </a:r>
           </a:p>
           <a:p>
             <a:pPr lvl="2"/>
             <a:r>
-              <a:rPr lang="zh-TW" altLang="en-US" smtClean="0"/>
+              <a:rPr lang="zh-TW" altLang="en-US"/>
               <a:t>第三層</a:t>
             </a:r>
           </a:p>
           <a:p>
             <a:pPr lvl="3"/>
             <a:r>
-              <a:rPr lang="zh-TW" altLang="en-US" smtClean="0"/>
+              <a:rPr lang="zh-TW" altLang="en-US"/>
               <a:t>第四層</a:t>
             </a:r>
           </a:p>
           <a:p>
             <a:pPr lvl="4"/>
             <a:r>
-              <a:rPr lang="zh-TW" altLang="en-US" smtClean="0"/>
+              <a:rPr lang="zh-TW" altLang="en-US"/>
               <a:t>第五層</a:t>
             </a:r>
-            <a:endParaRPr lang="zh-TW" altLang="en-US"/>
           </a:p>
         </p:txBody>
       </p:sp>
@@ -2735,7 +2738,7 @@
           <a:p>
             <a:fld id="{5FE59850-C8E3-47BC-9105-AE38EDB88EB5}" type="datetimeFigureOut">
               <a:rPr lang="en-US" smtClean="0"/>
-              <a:t>9/29/2023</a:t>
+              <a:t>6/19/2026</a:t>
             </a:fld>
             <a:endParaRPr lang="en-US"/>
           </a:p>
@@ -3147,24 +3150,7 @@
                 <a:latin typeface="微軟正黑體" pitchFamily="34" charset="-120"/>
                 <a:ea typeface="微軟正黑體" pitchFamily="34" charset="-120"/>
               </a:rPr>
-              <a:t>馨</a:t>
-            </a:r>
-            <a:r>
-              <a:rPr lang="zh-CN" altLang="en-US" sz="7200" b="1" i="1" dirty="0">
-                <a:solidFill>
-                  <a:srgbClr val="660033"/>
-                </a:solidFill>
-                <a:effectLst>
-                  <a:outerShdw blurRad="38100" dist="38100" dir="2700000" algn="tl">
-                    <a:srgbClr val="000000">
-                      <a:alpha val="43137"/>
-                    </a:srgbClr>
-                  </a:outerShdw>
-                </a:effectLst>
-                <a:latin typeface="微軟正黑體" pitchFamily="34" charset="-120"/>
-                <a:ea typeface="微軟正黑體" pitchFamily="34" charset="-120"/>
-              </a:rPr>
-              <a:t>香晚祭</a:t>
+              <a:t>馨香晚祭</a:t>
             </a:r>
           </a:p>
         </p:txBody>
@@ -3232,47 +3218,7 @@
                 <a:latin typeface="微軟正黑體" pitchFamily="34" charset="-120"/>
                 <a:ea typeface="微軟正黑體" pitchFamily="34" charset="-120"/>
               </a:rPr>
-              <a:t>耶</a:t>
-            </a:r>
-            <a:r>
-              <a:rPr lang="zh-TW" altLang="en-US" sz="6400" b="1" dirty="0">
-                <a:solidFill>
-                  <a:srgbClr val="660033"/>
-                </a:solidFill>
-                <a:latin typeface="微軟正黑體" pitchFamily="34" charset="-120"/>
-                <a:ea typeface="微軟正黑體" pitchFamily="34" charset="-120"/>
-              </a:rPr>
-              <a:t>和華 </a:t>
-            </a:r>
-            <a:r>
-              <a:rPr lang="zh-TW" altLang="en-US" sz="6400" b="1" dirty="0">
-                <a:solidFill>
-                  <a:srgbClr val="660033"/>
-                </a:solidFill>
-                <a:latin typeface="微軟正黑體" pitchFamily="34" charset="-120"/>
-                <a:ea typeface="微軟正黑體" pitchFamily="34" charset="-120"/>
-              </a:rPr>
-              <a:t> 我</a:t>
-            </a:r>
-            <a:r>
-              <a:rPr lang="zh-TW" altLang="en-US" sz="6400" b="1" dirty="0">
-                <a:solidFill>
-                  <a:srgbClr val="660033"/>
-                </a:solidFill>
-                <a:latin typeface="微軟正黑體" pitchFamily="34" charset="-120"/>
-                <a:ea typeface="微軟正黑體" pitchFamily="34" charset="-120"/>
-              </a:rPr>
-              <a:t>的避難</a:t>
-            </a:r>
-            <a:r>
-              <a:rPr lang="zh-TW" altLang="en-US" sz="6400" b="1" dirty="0">
-                <a:solidFill>
-                  <a:srgbClr val="660033"/>
-                </a:solidFill>
-                <a:latin typeface="微軟正黑體" pitchFamily="34" charset="-120"/>
-                <a:ea typeface="微軟正黑體" pitchFamily="34" charset="-120"/>
-              </a:rPr>
-              <a:t>所</a:t>
+              <a:t>耶和華  我的避難所</a:t>
             </a:r>
             <a:endParaRPr lang="en-US" altLang="zh-TW" sz="6400" b="1" dirty="0">
               <a:solidFill>
@@ -3294,17 +3240,7 @@
                 <a:latin typeface="微軟正黑體" pitchFamily="34" charset="-120"/>
                 <a:ea typeface="微軟正黑體" pitchFamily="34" charset="-120"/>
               </a:rPr>
-              <a:t>求</a:t>
-            </a:r>
-            <a:r>
-              <a:rPr lang="zh-TW" altLang="en-US" sz="6400" b="1" dirty="0">
-                <a:solidFill>
-                  <a:srgbClr val="660033"/>
-                </a:solidFill>
-                <a:latin typeface="微軟正黑體" pitchFamily="34" charset="-120"/>
-                <a:ea typeface="微軟正黑體" pitchFamily="34" charset="-120"/>
-              </a:rPr>
-              <a:t>祢留心聽我的聲音</a:t>
+              <a:t>求祢留心聽我的聲音</a:t>
             </a:r>
             <a:endParaRPr lang="en-US" altLang="zh-TW" sz="6400" b="1" dirty="0">
               <a:solidFill>
@@ -3357,7 +3293,7 @@
                 <a:latin typeface="Microsoft JhengHei" panose="020B0604030504040204" pitchFamily="34" charset="-120"/>
                 <a:ea typeface="Microsoft JhengHei" panose="020B0604030504040204" pitchFamily="34" charset="-120"/>
               </a:rPr>
-              <a:t>正</a:t>
+              <a:t>正歌</a:t>
             </a:r>
             <a:r>
               <a:rPr lang="en-US" sz="3200" b="1" dirty="0">
@@ -3441,37 +3377,7 @@
                 <a:latin typeface="微軟正黑體" pitchFamily="34" charset="-120"/>
                 <a:ea typeface="微軟正黑體" pitchFamily="34" charset="-120"/>
               </a:rPr>
-              <a:t>願我的禱告如香 </a:t>
-            </a:r>
-            <a:r>
-              <a:rPr lang="zh-TW" altLang="en-US" sz="6400" b="1" dirty="0">
-                <a:solidFill>
-                  <a:srgbClr val="660033"/>
-                </a:solidFill>
-                <a:latin typeface="微軟正黑體" pitchFamily="34" charset="-120"/>
-                <a:ea typeface="微軟正黑體" pitchFamily="34" charset="-120"/>
-              </a:rPr>
-              <a:t> 陳</a:t>
-            </a:r>
-            <a:r>
-              <a:rPr lang="zh-TW" altLang="en-US" sz="6400" b="1" dirty="0">
-                <a:solidFill>
-                  <a:srgbClr val="660033"/>
-                </a:solidFill>
-                <a:latin typeface="微軟正黑體" pitchFamily="34" charset="-120"/>
-                <a:ea typeface="微軟正黑體" pitchFamily="34" charset="-120"/>
-              </a:rPr>
-              <a:t>列祢面</a:t>
-            </a:r>
-            <a:r>
-              <a:rPr lang="zh-TW" altLang="en-US" sz="6400" b="1" dirty="0">
-                <a:solidFill>
-                  <a:srgbClr val="660033"/>
-                </a:solidFill>
-                <a:latin typeface="微軟正黑體" pitchFamily="34" charset="-120"/>
-                <a:ea typeface="微軟正黑體" pitchFamily="34" charset="-120"/>
-              </a:rPr>
-              <a:t>前</a:t>
+              <a:t>願我的禱告如香  陳列祢面前</a:t>
             </a:r>
             <a:endParaRPr lang="en-US" altLang="zh-TW" sz="6400" b="1" dirty="0">
               <a:solidFill>
@@ -3493,37 +3399,7 @@
                 <a:latin typeface="微軟正黑體" pitchFamily="34" charset="-120"/>
                 <a:ea typeface="微軟正黑體" pitchFamily="34" charset="-120"/>
               </a:rPr>
-              <a:t>我</a:t>
-            </a:r>
-            <a:r>
-              <a:rPr lang="zh-TW" altLang="en-US" sz="6400" b="1" dirty="0">
-                <a:solidFill>
-                  <a:srgbClr val="660033"/>
-                </a:solidFill>
-                <a:latin typeface="微軟正黑體" pitchFamily="34" charset="-120"/>
-                <a:ea typeface="微軟正黑體" pitchFamily="34" charset="-120"/>
-              </a:rPr>
-              <a:t>舉手祈求 </a:t>
-            </a:r>
-            <a:r>
-              <a:rPr lang="zh-TW" altLang="en-US" sz="6400" b="1" dirty="0">
-                <a:solidFill>
-                  <a:srgbClr val="660033"/>
-                </a:solidFill>
-                <a:latin typeface="微軟正黑體" pitchFamily="34" charset="-120"/>
-                <a:ea typeface="微軟正黑體" pitchFamily="34" charset="-120"/>
-              </a:rPr>
-              <a:t> 如</a:t>
-            </a:r>
-            <a:r>
-              <a:rPr lang="zh-TW" altLang="en-US" sz="6400" b="1" dirty="0">
-                <a:solidFill>
-                  <a:srgbClr val="660033"/>
-                </a:solidFill>
-                <a:latin typeface="微軟正黑體" pitchFamily="34" charset="-120"/>
-                <a:ea typeface="微軟正黑體" pitchFamily="34" charset="-120"/>
-              </a:rPr>
-              <a:t>獻晚祭</a:t>
+              <a:t>我舉手祈求  如獻晚祭</a:t>
             </a:r>
             <a:endParaRPr lang="en-US" altLang="zh-TW" sz="6400" b="1" dirty="0">
               <a:solidFill>
@@ -3576,7 +3452,7 @@
                 <a:latin typeface="Microsoft JhengHei" panose="020B0604030504040204" pitchFamily="34" charset="-120"/>
                 <a:ea typeface="Microsoft JhengHei" panose="020B0604030504040204" pitchFamily="34" charset="-120"/>
               </a:rPr>
-              <a:t>正</a:t>
+              <a:t>正歌</a:t>
             </a:r>
             <a:r>
               <a:rPr lang="en-US" sz="3200" b="1" dirty="0">
@@ -3660,37 +3536,7 @@
                 <a:latin typeface="微軟正黑體" pitchFamily="34" charset="-120"/>
                 <a:ea typeface="微軟正黑體" pitchFamily="34" charset="-120"/>
               </a:rPr>
-              <a:t>耶和</a:t>
-            </a:r>
-            <a:r>
-              <a:rPr lang="zh-TW" altLang="en-US" sz="6400" b="1" dirty="0">
-                <a:solidFill>
-                  <a:srgbClr val="660033"/>
-                </a:solidFill>
-                <a:latin typeface="微軟正黑體" pitchFamily="34" charset="-120"/>
-                <a:ea typeface="微軟正黑體" pitchFamily="34" charset="-120"/>
-              </a:rPr>
-              <a:t>華  </a:t>
-            </a:r>
-            <a:r>
-              <a:rPr lang="zh-TW" altLang="en-US" sz="6400" b="1" dirty="0">
-                <a:solidFill>
-                  <a:srgbClr val="660033"/>
-                </a:solidFill>
-                <a:latin typeface="微軟正黑體" pitchFamily="34" charset="-120"/>
-                <a:ea typeface="微軟正黑體" pitchFamily="34" charset="-120"/>
-              </a:rPr>
-              <a:t>我的力量</a:t>
-            </a:r>
-            <a:r>
-              <a:rPr lang="zh-TW" altLang="en-US" sz="6400" b="1" dirty="0">
-                <a:solidFill>
-                  <a:srgbClr val="660033"/>
-                </a:solidFill>
-                <a:latin typeface="微軟正黑體" pitchFamily="34" charset="-120"/>
-                <a:ea typeface="微軟正黑體" pitchFamily="34" charset="-120"/>
-              </a:rPr>
-              <a:t>啊</a:t>
+              <a:t>耶和華  我的力量啊</a:t>
             </a:r>
             <a:endParaRPr lang="en-US" altLang="zh-TW" sz="6400" b="1" dirty="0">
               <a:solidFill>
@@ -3712,17 +3558,7 @@
                 <a:latin typeface="微軟正黑體" pitchFamily="34" charset="-120"/>
                 <a:ea typeface="微軟正黑體" pitchFamily="34" charset="-120"/>
               </a:rPr>
-              <a:t>求</a:t>
-            </a:r>
-            <a:r>
-              <a:rPr lang="zh-TW" altLang="en-US" sz="6400" b="1" dirty="0">
-                <a:solidFill>
-                  <a:srgbClr val="660033"/>
-                </a:solidFill>
-                <a:latin typeface="微軟正黑體" pitchFamily="34" charset="-120"/>
-                <a:ea typeface="微軟正黑體" pitchFamily="34" charset="-120"/>
-              </a:rPr>
-              <a:t>祢賜給我正直的心</a:t>
+              <a:t>求祢賜給我正直的心</a:t>
             </a:r>
             <a:endParaRPr lang="en-US" altLang="zh-TW" sz="6400" b="1" dirty="0">
               <a:solidFill>
@@ -3775,7 +3611,7 @@
                 <a:latin typeface="Microsoft JhengHei" panose="020B0604030504040204" pitchFamily="34" charset="-120"/>
                 <a:ea typeface="Microsoft JhengHei" panose="020B0604030504040204" pitchFamily="34" charset="-120"/>
               </a:rPr>
-              <a:t>正</a:t>
+              <a:t>正歌</a:t>
             </a:r>
             <a:r>
               <a:rPr lang="en-US" sz="3200" b="1" dirty="0">
@@ -3859,17 +3695,7 @@
                 <a:latin typeface="微軟正黑體" pitchFamily="34" charset="-120"/>
                 <a:ea typeface="微軟正黑體" pitchFamily="34" charset="-120"/>
               </a:rPr>
-              <a:t>不教我陷入那世間誘</a:t>
-            </a:r>
-            <a:r>
-              <a:rPr lang="zh-TW" altLang="en-US" sz="6400" b="1" dirty="0">
-                <a:solidFill>
-                  <a:srgbClr val="660033"/>
-                </a:solidFill>
-                <a:latin typeface="微軟正黑體" pitchFamily="34" charset="-120"/>
-                <a:ea typeface="微軟正黑體" pitchFamily="34" charset="-120"/>
-              </a:rPr>
-              <a:t>惑</a:t>
+              <a:t>不教我陷入那世間誘惑</a:t>
             </a:r>
             <a:endParaRPr lang="en-US" altLang="zh-TW" sz="6400" b="1" dirty="0">
               <a:solidFill>
@@ -3891,37 +3717,7 @@
                 <a:latin typeface="微軟正黑體" pitchFamily="34" charset="-120"/>
                 <a:ea typeface="微軟正黑體" pitchFamily="34" charset="-120"/>
               </a:rPr>
-              <a:t>救</a:t>
-            </a:r>
-            <a:r>
-              <a:rPr lang="zh-TW" altLang="en-US" sz="6400" b="1" dirty="0">
-                <a:solidFill>
-                  <a:srgbClr val="660033"/>
-                </a:solidFill>
-                <a:latin typeface="微軟正黑體" pitchFamily="34" charset="-120"/>
-                <a:ea typeface="微軟正黑體" pitchFamily="34" charset="-120"/>
-              </a:rPr>
-              <a:t>我脫離 </a:t>
-            </a:r>
-            <a:r>
-              <a:rPr lang="zh-TW" altLang="en-US" sz="6400" b="1" dirty="0">
-                <a:solidFill>
-                  <a:srgbClr val="660033"/>
-                </a:solidFill>
-                <a:latin typeface="微軟正黑體" pitchFamily="34" charset="-120"/>
-                <a:ea typeface="微軟正黑體" pitchFamily="34" charset="-120"/>
-              </a:rPr>
-              <a:t> 惡</a:t>
-            </a:r>
-            <a:r>
-              <a:rPr lang="zh-TW" altLang="en-US" sz="6400" b="1" dirty="0">
-                <a:solidFill>
-                  <a:srgbClr val="660033"/>
-                </a:solidFill>
-                <a:latin typeface="微軟正黑體" pitchFamily="34" charset="-120"/>
-                <a:ea typeface="微軟正黑體" pitchFamily="34" charset="-120"/>
-              </a:rPr>
-              <a:t>人網羅</a:t>
+              <a:t>救我脫離  惡人網羅</a:t>
             </a:r>
             <a:endParaRPr lang="en-US" altLang="zh-TW" sz="6400" b="1" dirty="0">
               <a:solidFill>
@@ -3974,7 +3770,7 @@
                 <a:latin typeface="Microsoft JhengHei" panose="020B0604030504040204" pitchFamily="34" charset="-120"/>
                 <a:ea typeface="Microsoft JhengHei" panose="020B0604030504040204" pitchFamily="34" charset="-120"/>
               </a:rPr>
-              <a:t>正</a:t>
+              <a:t>正歌</a:t>
             </a:r>
             <a:r>
               <a:rPr lang="en-US" sz="3200" b="1" dirty="0">
@@ -4058,37 +3854,7 @@
                 <a:latin typeface="微軟正黑體" pitchFamily="34" charset="-120"/>
                 <a:ea typeface="微軟正黑體" pitchFamily="34" charset="-120"/>
               </a:rPr>
-              <a:t>求祢指教我 </a:t>
-            </a:r>
-            <a:r>
-              <a:rPr lang="zh-CN" altLang="en-US" sz="6400" b="1" dirty="0">
-                <a:solidFill>
-                  <a:srgbClr val="660033"/>
-                </a:solidFill>
-                <a:latin typeface="微軟正黑體" pitchFamily="34" charset="-120"/>
-                <a:ea typeface="微軟正黑體" pitchFamily="34" charset="-120"/>
-              </a:rPr>
-              <a:t> 如</a:t>
-            </a:r>
-            <a:r>
-              <a:rPr lang="zh-CN" altLang="en-US" sz="6400" b="1" dirty="0">
-                <a:solidFill>
-                  <a:srgbClr val="660033"/>
-                </a:solidFill>
-                <a:latin typeface="微軟正黑體" pitchFamily="34" charset="-120"/>
-                <a:ea typeface="微軟正黑體" pitchFamily="34" charset="-120"/>
-              </a:rPr>
-              <a:t>何遵行祢旨</a:t>
-            </a:r>
-            <a:r>
-              <a:rPr lang="zh-CN" altLang="en-US" sz="6400" b="1" dirty="0">
-                <a:solidFill>
-                  <a:srgbClr val="660033"/>
-                </a:solidFill>
-                <a:latin typeface="微軟正黑體" pitchFamily="34" charset="-120"/>
-                <a:ea typeface="微軟正黑體" pitchFamily="34" charset="-120"/>
-              </a:rPr>
-              <a:t>意</a:t>
+              <a:t>求祢指教我  如何遵行祢旨意</a:t>
             </a:r>
             <a:endParaRPr lang="en-US" altLang="zh-CN" sz="6400" b="1" dirty="0">
               <a:solidFill>
@@ -4110,17 +3876,7 @@
                 <a:latin typeface="微軟正黑體" pitchFamily="34" charset="-120"/>
                 <a:ea typeface="微軟正黑體" pitchFamily="34" charset="-120"/>
               </a:rPr>
-              <a:t>因</a:t>
-            </a:r>
-            <a:r>
-              <a:rPr lang="zh-CN" altLang="en-US" sz="6400" b="1" dirty="0">
-                <a:solidFill>
-                  <a:srgbClr val="660033"/>
-                </a:solidFill>
-                <a:latin typeface="微軟正黑體" pitchFamily="34" charset="-120"/>
-                <a:ea typeface="微軟正黑體" pitchFamily="34" charset="-120"/>
-              </a:rPr>
-              <a:t>為祢的名將我救活</a:t>
+              <a:t>因為祢的名將我救活</a:t>
             </a:r>
             <a:endParaRPr lang="en-US" altLang="zh-TW" sz="6400" b="1" dirty="0">
               <a:solidFill>
@@ -4173,7 +3929,7 @@
                 <a:latin typeface="Microsoft JhengHei" panose="020B0604030504040204" pitchFamily="34" charset="-120"/>
                 <a:ea typeface="Microsoft JhengHei" panose="020B0604030504040204" pitchFamily="34" charset="-120"/>
               </a:rPr>
-              <a:t>副</a:t>
+              <a:t>副歌</a:t>
             </a:r>
             <a:r>
               <a:rPr lang="en-US" sz="3200" b="1" dirty="0">
@@ -4257,37 +4013,7 @@
                 <a:latin typeface="微軟正黑體" pitchFamily="34" charset="-120"/>
                 <a:ea typeface="微軟正黑體" pitchFamily="34" charset="-120"/>
               </a:rPr>
-              <a:t>因祢是我</a:t>
-            </a:r>
-            <a:r>
-              <a:rPr lang="zh-CN" altLang="en-US" sz="6400" b="1" dirty="0">
-                <a:solidFill>
-                  <a:srgbClr val="660033"/>
-                </a:solidFill>
-                <a:latin typeface="微軟正黑體" pitchFamily="34" charset="-120"/>
-                <a:ea typeface="微軟正黑體" pitchFamily="34" charset="-120"/>
-              </a:rPr>
-              <a:t>神  </a:t>
-            </a:r>
-            <a:r>
-              <a:rPr lang="zh-CN" altLang="en-US" sz="6400" b="1" dirty="0">
-                <a:solidFill>
-                  <a:srgbClr val="660033"/>
-                </a:solidFill>
-                <a:latin typeface="微軟正黑體" pitchFamily="34" charset="-120"/>
-                <a:ea typeface="微軟正黑體" pitchFamily="34" charset="-120"/>
-              </a:rPr>
-              <a:t>將我藏在羽翼</a:t>
-            </a:r>
-            <a:r>
-              <a:rPr lang="zh-CN" altLang="en-US" sz="6400" b="1" dirty="0">
-                <a:solidFill>
-                  <a:srgbClr val="660033"/>
-                </a:solidFill>
-                <a:latin typeface="微軟正黑體" pitchFamily="34" charset="-120"/>
-                <a:ea typeface="微軟正黑體" pitchFamily="34" charset="-120"/>
-              </a:rPr>
-              <a:t>中</a:t>
+              <a:t>因祢是我神  將我藏在羽翼中</a:t>
             </a:r>
             <a:endParaRPr lang="en-US" altLang="zh-CN" sz="6400" b="1" dirty="0">
               <a:solidFill>
@@ -4309,17 +4035,7 @@
                 <a:latin typeface="微軟正黑體" pitchFamily="34" charset="-120"/>
                 <a:ea typeface="微軟正黑體" pitchFamily="34" charset="-120"/>
               </a:rPr>
-              <a:t>我</a:t>
-            </a:r>
-            <a:r>
-              <a:rPr lang="zh-CN" altLang="en-US" sz="6400" b="1" dirty="0">
-                <a:solidFill>
-                  <a:srgbClr val="660033"/>
-                </a:solidFill>
-                <a:latin typeface="微軟正黑體" pitchFamily="34" charset="-120"/>
-                <a:ea typeface="微軟正黑體" pitchFamily="34" charset="-120"/>
-              </a:rPr>
-              <a:t>的心將一生仰望祢</a:t>
+              <a:t>我的心將一生仰望祢</a:t>
             </a:r>
             <a:endParaRPr lang="en-US" altLang="zh-TW" sz="6400" b="1" dirty="0">
               <a:solidFill>
@@ -4372,7 +4088,7 @@
                 <a:latin typeface="Microsoft JhengHei" panose="020B0604030504040204" pitchFamily="34" charset="-120"/>
                 <a:ea typeface="Microsoft JhengHei" panose="020B0604030504040204" pitchFamily="34" charset="-120"/>
               </a:rPr>
-              <a:t>副</a:t>
+              <a:t>副歌</a:t>
             </a:r>
             <a:r>
               <a:rPr lang="en-US" sz="3200" b="1" dirty="0">
@@ -4385,7 +4101,7 @@
               <a:t> )</a:t>
             </a:r>
             <a:r>
-              <a:rPr lang="zh-CN" altLang="en-US" sz="3200" b="1" dirty="0">
+              <a:rPr lang="zh-CN" altLang="en-US" sz="3200" b="1">
                 <a:solidFill>
                   <a:srgbClr val="660033"/>
                 </a:solidFill>
